--- a/public/blog/presentations/es/semi-truck-accident-in-anchorage-alaska-what-to-do-2026.pptx
+++ b/public/blog/presentations/es/semi-truck-accident-in-anchorage-alaska-what-to-do-2026.pptx
@@ -4704,7 +4704,7 @@
               </a:defRPr>
             </a:pPr>
             <a:r>
-              <a:t>Truck Accidents · Alaska · 2026-05-31</a:t>
+              <a:t>Truck Accidents · Alaska · 2026-06-01</a:t>
             </a:r>
           </a:p>
         </p:txBody>
